--- a/MyOwnPresentations/pptx/Divide_Conquer_Recursion_II.pptx
+++ b/MyOwnPresentations/pptx/Divide_Conquer_Recursion_II.pptx
@@ -256,7 +256,7 @@
           <a:p>
             <a:fld id="{20ADFE78-208B-402D-B1CF-A34F52562469}" type="datetimeFigureOut">
               <a:rPr lang="en-US" smtClean="0"/>
-              <a:t>8/23/2025</a:t>
+              <a:t>2/21/2026</a:t>
             </a:fld>
             <a:endParaRPr lang="en-US"/>
           </a:p>
@@ -670,7 +670,7 @@
           <a:p>
             <a:fld id="{5C041930-F8FC-4542-827E-E504F4750562}" type="datetimeFigureOut">
               <a:rPr lang="en-US" smtClean="0"/>
-              <a:t>8/23/2025</a:t>
+              <a:t>2/21/2026</a:t>
             </a:fld>
             <a:endParaRPr lang="en-US"/>
           </a:p>
@@ -868,7 +868,7 @@
           <a:p>
             <a:fld id="{5C041930-F8FC-4542-827E-E504F4750562}" type="datetimeFigureOut">
               <a:rPr lang="en-US" smtClean="0"/>
-              <a:t>8/23/2025</a:t>
+              <a:t>2/21/2026</a:t>
             </a:fld>
             <a:endParaRPr lang="en-US"/>
           </a:p>
@@ -1076,7 +1076,7 @@
           <a:p>
             <a:fld id="{5C041930-F8FC-4542-827E-E504F4750562}" type="datetimeFigureOut">
               <a:rPr lang="en-US" smtClean="0"/>
-              <a:t>8/23/2025</a:t>
+              <a:t>2/21/2026</a:t>
             </a:fld>
             <a:endParaRPr lang="en-US"/>
           </a:p>
@@ -1274,7 +1274,7 @@
           <a:p>
             <a:fld id="{5C041930-F8FC-4542-827E-E504F4750562}" type="datetimeFigureOut">
               <a:rPr lang="en-US" smtClean="0"/>
-              <a:t>8/23/2025</a:t>
+              <a:t>2/21/2026</a:t>
             </a:fld>
             <a:endParaRPr lang="en-US"/>
           </a:p>
@@ -1549,7 +1549,7 @@
           <a:p>
             <a:fld id="{5C041930-F8FC-4542-827E-E504F4750562}" type="datetimeFigureOut">
               <a:rPr lang="en-US" smtClean="0"/>
-              <a:t>8/23/2025</a:t>
+              <a:t>2/21/2026</a:t>
             </a:fld>
             <a:endParaRPr lang="en-US"/>
           </a:p>
@@ -1814,7 +1814,7 @@
           <a:p>
             <a:fld id="{5C041930-F8FC-4542-827E-E504F4750562}" type="datetimeFigureOut">
               <a:rPr lang="en-US" smtClean="0"/>
-              <a:t>8/23/2025</a:t>
+              <a:t>2/21/2026</a:t>
             </a:fld>
             <a:endParaRPr lang="en-US"/>
           </a:p>
@@ -2226,7 +2226,7 @@
           <a:p>
             <a:fld id="{5C041930-F8FC-4542-827E-E504F4750562}" type="datetimeFigureOut">
               <a:rPr lang="en-US" smtClean="0"/>
-              <a:t>8/23/2025</a:t>
+              <a:t>2/21/2026</a:t>
             </a:fld>
             <a:endParaRPr lang="en-US"/>
           </a:p>
@@ -2367,7 +2367,7 @@
           <a:p>
             <a:fld id="{5C041930-F8FC-4542-827E-E504F4750562}" type="datetimeFigureOut">
               <a:rPr lang="en-US" smtClean="0"/>
-              <a:t>8/23/2025</a:t>
+              <a:t>2/21/2026</a:t>
             </a:fld>
             <a:endParaRPr lang="en-US"/>
           </a:p>
@@ -2480,7 +2480,7 @@
           <a:p>
             <a:fld id="{5C041930-F8FC-4542-827E-E504F4750562}" type="datetimeFigureOut">
               <a:rPr lang="en-US" smtClean="0"/>
-              <a:t>8/23/2025</a:t>
+              <a:t>2/21/2026</a:t>
             </a:fld>
             <a:endParaRPr lang="en-US"/>
           </a:p>
@@ -2791,7 +2791,7 @@
           <a:p>
             <a:fld id="{5C041930-F8FC-4542-827E-E504F4750562}" type="datetimeFigureOut">
               <a:rPr lang="en-US" smtClean="0"/>
-              <a:t>8/23/2025</a:t>
+              <a:t>2/21/2026</a:t>
             </a:fld>
             <a:endParaRPr lang="en-US"/>
           </a:p>
@@ -3079,7 +3079,7 @@
           <a:p>
             <a:fld id="{5C041930-F8FC-4542-827E-E504F4750562}" type="datetimeFigureOut">
               <a:rPr lang="en-US" smtClean="0"/>
-              <a:t>8/23/2025</a:t>
+              <a:t>2/21/2026</a:t>
             </a:fld>
             <a:endParaRPr lang="en-US"/>
           </a:p>
@@ -3320,7 +3320,7 @@
           <a:p>
             <a:fld id="{5C041930-F8FC-4542-827E-E504F4750562}" type="datetimeFigureOut">
               <a:rPr lang="en-US" smtClean="0"/>
-              <a:t>8/23/2025</a:t>
+              <a:t>2/21/2026</a:t>
             </a:fld>
             <a:endParaRPr lang="en-US"/>
           </a:p>
@@ -4144,7 +4144,7 @@
                   <a:srgbClr val="FFFFFF"/>
                 </a:solidFill>
               </a:rPr>
-              <a:t>2025/26. Autumn Semester</a:t>
+              <a:t>2025/26. Spring Semester</a:t>
             </a:r>
           </a:p>
           <a:p>
@@ -5775,8 +5775,8 @@
           </a:p>
         </p:txBody>
       </p:sp>
-      <mc:AlternateContent xmlns:mc="http://schemas.openxmlformats.org/markup-compatibility/2006">
-        <mc:Choice xmlns:a14="http://schemas.microsoft.com/office/drawing/2010/main" Requires="a14">
+      <mc:AlternateContent xmlns:mc="http://schemas.openxmlformats.org/markup-compatibility/2006" xmlns:a14="http://schemas.microsoft.com/office/drawing/2010/main">
+        <mc:Choice Requires="a14">
           <p:sp>
             <p:nvSpPr>
               <p:cNvPr id="2" name="Title 1">
@@ -6058,7 +6058,7 @@
             </p:txBody>
           </p:sp>
         </mc:Choice>
-        <mc:Fallback>
+        <mc:Fallback xmlns="">
           <p:sp>
             <p:nvSpPr>
               <p:cNvPr id="2" name="Title 1">
@@ -6568,8 +6568,8 @@
           </a:p>
         </p:txBody>
       </p:sp>
-      <mc:AlternateContent xmlns:mc="http://schemas.openxmlformats.org/markup-compatibility/2006">
-        <mc:Choice xmlns:a14="http://schemas.microsoft.com/office/drawing/2010/main" Requires="a14">
+      <mc:AlternateContent xmlns:mc="http://schemas.openxmlformats.org/markup-compatibility/2006" xmlns:a14="http://schemas.microsoft.com/office/drawing/2010/main">
+        <mc:Choice Requires="a14">
           <p:sp>
             <p:nvSpPr>
               <p:cNvPr id="2" name="Title 1">
@@ -6799,7 +6799,7 @@
             </p:txBody>
           </p:sp>
         </mc:Choice>
-        <mc:Fallback>
+        <mc:Fallback xmlns="">
           <p:sp>
             <p:nvSpPr>
               <p:cNvPr id="2" name="Title 1">
